--- a/curso_es/pptx/S82.pptx
+++ b/curso_es/pptx/S82.pptx
@@ -3903,7 +3903,7 @@
                 </a:solidFill>
                 <a:latin typeface="Nunito Sans"/>
               </a:rPr>
-              <a:t>Leire lee: «Las mujeres cobran de media menos que los hombres». Concluye: «Entonces a mi madre le pagan menos que a su compañero por hacer lo mismo».</a:t>
+              <a:t>Una chica lee: «Las mujeres cobran de media menos que los hombres». Concluye: «Entonces a mi madre le pagan menos que a su compañero por hacer lo mismo».</a:t>
             </a:r>
           </a:p>
         </p:txBody>
@@ -4593,7 +4593,7 @@
                 </a:solidFill>
                 <a:latin typeface="Nunito Sans"/>
               </a:rPr>
-              <a:t>Dylan: «La diferencia de sueldo es porque muchas mujeres trabajan a jornada parcial. Así que no hay ninguna desigualdad».</a:t>
+              <a:t>Un chico: «La diferencia de sueldo es porque muchas mujeres trabajan a jornada parcial. Así que no hay ninguna desigualdad».</a:t>
             </a:r>
           </a:p>
         </p:txBody>
@@ -6301,7 +6301,7 @@
                 </a:solidFill>
                 <a:latin typeface="Nunito Sans"/>
               </a:rPr>
-              <a:t>Kevin: «Las chicas y los chicos ya son iguales. Hoy cualquiera puede estudiar lo que quiera».</a:t>
+              <a:t>Un chico: «Las chicas y los chicos ya son iguales. Hoy cualquiera puede estudiar lo que quiera».</a:t>
             </a:r>
           </a:p>
         </p:txBody>
@@ -6701,7 +6701,7 @@
                           </a:solidFill>
                           <a:latin typeface="Nunito Sans"/>
                         </a:rPr>
-                        <a:t>Leire es alta y Omar, bajito. A Iker le gusta bailar.</a:t>
+                        <a:t>Una chica es alta y un chico, bajito. A otro le gusta bailar.</a:t>
                       </a:r>
                     </a:p>
                   </a:txBody>
